--- a/metro/metro-x06-business-card-front.pptx
+++ b/metro/metro-x06-business-card-front.pptx
@@ -3593,9 +3593,9 @@
                 <a:solidFill>
                   <a:srgbClr val="14161A"/>
                 </a:solidFill>
-                <a:latin typeface="Space Grotesk"/>
-                <a:ea typeface="Space Grotesk"/>
-                <a:cs typeface="Space Grotesk"/>
+                <a:latin typeface="HK Grotesk"/>
+                <a:ea typeface="HK Grotesk"/>
+                <a:cs typeface="HK Grotesk"/>
               </a:rPr>
               <a:t>Julian Reyes</a:t>
             </a:r>
@@ -3667,9 +3667,9 @@
                 <a:solidFill>
                   <a:srgbClr val="14161A"/>
                 </a:solidFill>
-                <a:latin typeface="Space Grotesk"/>
-                <a:ea typeface="Space Grotesk"/>
-                <a:cs typeface="Space Grotesk"/>
+                <a:latin typeface="HK Grotesk"/>
+                <a:ea typeface="HK Grotesk"/>
+                <a:cs typeface="HK Grotesk"/>
               </a:rPr>
               <a:t>NO</a:t>
             </a:r>
